--- a/docs/voc_insights_deck.pptx
+++ b/docs/voc_insights_deck.pptx
@@ -4598,7 +4598,7 @@
                 </a:solidFill>
                 <a:latin typeface="Segoe UI"/>
               </a:rPr>
-              <a:t>9,457</a:t>
+              <a:t>9,707</a:t>
             </a:r>
           </a:p>
           <a:p>

--- a/docs/voc_insights_deck.pptx
+++ b/docs/voc_insights_deck.pptx
@@ -3272,7 +3272,7 @@
                 </a:solidFill>
                 <a:latin typeface="Segoe UI"/>
               </a:rPr>
-              <a:t>Working proof of concept  ·  4,425 real contacts  ·  24 months  ·  runs offline</a:t>
+              <a:t>Working proof of concept  ·  5,425 real contacts  ·  24 months  ·  runs offline</a:t>
             </a:r>
           </a:p>
         </p:txBody>
@@ -3635,7 +3635,7 @@
                 </a:solidFill>
                 <a:latin typeface="Segoe UI"/>
               </a:rPr>
-              <a:t>35</a:t>
+              <a:t>83</a:t>
             </a:r>
           </a:p>
           <a:p>
@@ -3716,7 +3716,7 @@
                 </a:solidFill>
                 <a:latin typeface="Segoe UI"/>
               </a:rPr>
-              <a:t>35</a:t>
+              <a:t>80</a:t>
             </a:r>
           </a:p>
           <a:p>
@@ -3797,7 +3797,7 @@
                 </a:solidFill>
                 <a:latin typeface="Segoe UI"/>
               </a:rPr>
-              <a:t>40</a:t>
+              <a:t>80</a:t>
             </a:r>
           </a:p>
           <a:p>
@@ -4598,7 +4598,7 @@
                 </a:solidFill>
                 <a:latin typeface="Segoe UI"/>
               </a:rPr>
-              <a:t>9,707</a:t>
+              <a:t>10,103</a:t>
             </a:r>
           </a:p>
           <a:p>
@@ -5311,7 +5311,7 @@
                 </a:solidFill>
                 <a:latin typeface="Segoe UI"/>
               </a:rPr>
-              <a:t>The stated reason is supposed to differ often from the real driver. In this corpus it differs in about 1 contact in 80. Someone writing to a regulator leads with the grievance; someone phoning opens with what they want. The capability is built and works. On real call transcripts we expect it to matter far more.</a:t>
+              <a:t>The stated reason is supposed to differ often from the real driver. In this corpus it differs in about 1 contact in 55. Someone writing to a regulator leads with the grievance; someone phoning opens with what they want. The capability is built and works. On real call transcripts we expect it to matter far more.</a:t>
             </a:r>
           </a:p>
           <a:p>
@@ -5336,7 +5336,7 @@
                 </a:solidFill>
                 <a:latin typeface="Segoe UI"/>
               </a:rPr>
-              <a:t>Ranking positive themes returns nothing. What exists is 421 contacts carrying a moment that went right, and the product says so on the screen rather than inventing a score.</a:t>
+              <a:t>Ranking positive themes returns nothing. What exists is 1199 contacts carrying a moment that went right, and the product says so on the screen rather than inventing a score.</a:t>
             </a:r>
           </a:p>
           <a:p>
@@ -5576,7 +5576,7 @@
                 </a:solidFill>
                 <a:latin typeface="Segoe UI"/>
               </a:rPr>
-              <a:t>4,425 contacts read into a consistent structure, and any question about them answered in seconds.</a:t>
+              <a:t>5,425 contacts read into a consistent structure, and any question about them answered in seconds.</a:t>
             </a:r>
           </a:p>
         </p:txBody>
@@ -5698,7 +5698,7 @@
                 </a:solidFill>
                 <a:latin typeface="Segoe UI"/>
               </a:rPr>
-              <a:t>394 people describing one fixable failure in 397 different ways, named as one work item with an owner.</a:t>
+              <a:t>379 people describing one fixable failure in 381 different ways, named as one work item with an owner.</a:t>
             </a:r>
           </a:p>
         </p:txBody>
@@ -6409,7 +6409,7 @@
                 </a:solidFill>
                 <a:latin typeface="Segoe UI"/>
               </a:rPr>
-              <a:t>Real complaints, not a synthetic corpus</a:t>
+              <a:t>Two corpora, kept apart on purpose</a:t>
             </a:r>
           </a:p>
         </p:txBody>
@@ -6477,22 +6477,22 @@
               </a:spcAft>
             </a:pPr>
             <a:r>
-              <a:rPr sz="1700" b="1">
+              <a:rPr sz="1550" b="1">
                 <a:solidFill>
                   <a:srgbClr val="14171C"/>
                 </a:solidFill>
                 <a:latin typeface="Segoe UI"/>
               </a:rPr>
-              <a:t>Source.  </a:t>
-            </a:r>
-            <a:r>
-              <a:rPr sz="1700">
+              <a:t>Written complaints, real.  </a:t>
+            </a:r>
+            <a:r>
+              <a:rPr sz="1550">
                 <a:solidFill>
                   <a:srgbClr val="6B7280"/>
                 </a:solidFill>
                 <a:latin typeface="Segoe UI"/>
               </a:rPr>
-              <a:t>Consumer complaint narratives about one large US bank, pulled live from the US regulator's public database. Every record was written by a real person who consented to publication.</a:t>
+              <a:t>4,425 consumer complaint narratives about one large US bank, pulled live from the US regulator's public database. A constant 25.25% monthly sample on a fixed seed, so month-to-month movement is the real shape of the intake.</a:t>
             </a:r>
           </a:p>
           <a:p>
@@ -6502,22 +6502,22 @@
               </a:spcAft>
             </a:pPr>
             <a:r>
-              <a:rPr sz="1700" b="1">
+              <a:rPr sz="1550" b="1">
                 <a:solidFill>
                   <a:srgbClr val="14171C"/>
                 </a:solidFill>
                 <a:latin typeface="Segoe UI"/>
               </a:rPr>
-              <a:t>Sampling.  </a:t>
-            </a:r>
-            <a:r>
-              <a:rPr sz="1700">
+              <a:t>Call transcripts, synthetic.  </a:t>
+            </a:r>
+            <a:r>
+              <a:rPr sz="1550">
                 <a:solidFill>
                   <a:srgbClr val="6B7280"/>
                 </a:solidFill>
                 <a:latin typeface="Segoe UI"/>
               </a:rPr>
-              <a:t>A constant 25.25% of that bank's eligible narratives per month, fixed seed, hash-based. Month-to-month movement is the real shape of the intake, not an artefact of sampling.</a:t>
+              <a:t>1,000 agent and customer phone conversations from a published Hugging Face dataset, MIT licensed, whose own card says it is synthetically generated. Labelled SYNTHETIC wherever it appears, and switchable on or off at the top of the screen.</a:t>
             </a:r>
           </a:p>
           <a:p>
@@ -6527,22 +6527,22 @@
               </a:spcAft>
             </a:pPr>
             <a:r>
-              <a:rPr sz="1700" b="1">
+              <a:rPr sz="1550" b="1">
                 <a:solidFill>
                   <a:srgbClr val="14171C"/>
                 </a:solidFill>
                 <a:latin typeface="Segoe UI"/>
               </a:rPr>
-              <a:t>Size chosen by a gate, not a guess.  </a:t>
-            </a:r>
-            <a:r>
-              <a:rPr sz="1700">
+              <a:t>Why both.  </a:t>
+            </a:r>
+            <a:r>
+              <a:rPr sz="1550">
                 <a:solidFill>
                   <a:srgbClr val="6B7280"/>
                 </a:solidFill>
                 <a:latin typeface="Segoe UI"/>
               </a:rPr>
-              <a:t>At least 30 sampled contacts in 90% of weeks, two products and two segments with real volume, every month present. 4,000 failed the weekly gate. 4,425 passes.</a:t>
+              <a:t>A contact centre has conversations, not letters. The second corpus is what proves the transcript path: speaker turns, quotes restricted to what the customer said, and the reason given versus the reason underneath.</a:t>
             </a:r>
           </a:p>
         </p:txBody>
@@ -6555,8 +6555,8 @@
         </p:nvSpPr>
         <p:spPr>
           <a:xfrm>
-            <a:off x="777240" y="4617720"/>
-            <a:ext cx="1907987" cy="1188720"/>
+            <a:off x="777240" y="4892040"/>
+            <a:ext cx="1907987" cy="1097280"/>
           </a:xfrm>
           <a:prstGeom prst="rect">
             <a:avLst/>
@@ -6623,7 +6623,7 @@
                 </a:solidFill>
                 <a:latin typeface="Segoe UI"/>
               </a:rPr>
-              <a:t>contacts read</a:t>
+              <a:t>real complaints</a:t>
             </a:r>
           </a:p>
         </p:txBody>
@@ -6636,8 +6636,8 @@
         </p:nvSpPr>
         <p:spPr>
           <a:xfrm>
-            <a:off x="2959547" y="4617720"/>
-            <a:ext cx="1907987" cy="1188720"/>
+            <a:off x="2959547" y="4892040"/>
+            <a:ext cx="1907987" cy="1097280"/>
           </a:xfrm>
           <a:prstGeom prst="rect">
             <a:avLst/>
@@ -6685,7 +6685,7 @@
                 </a:solidFill>
                 <a:latin typeface="Segoe UI"/>
               </a:rPr>
-              <a:t>24</a:t>
+              <a:t>1,000</a:t>
             </a:r>
           </a:p>
           <a:p>
@@ -6704,7 +6704,7 @@
                 </a:solidFill>
                 <a:latin typeface="Segoe UI"/>
               </a:rPr>
-              <a:t>months</a:t>
+              <a:t>synthetic conversations</a:t>
             </a:r>
           </a:p>
         </p:txBody>
@@ -6717,8 +6717,8 @@
         </p:nvSpPr>
         <p:spPr>
           <a:xfrm>
-            <a:off x="5141854" y="4617720"/>
-            <a:ext cx="1907987" cy="1188720"/>
+            <a:off x="5141854" y="4892040"/>
+            <a:ext cx="1907987" cy="1097280"/>
           </a:xfrm>
           <a:prstGeom prst="rect">
             <a:avLst/>
@@ -6798,8 +6798,8 @@
         </p:nvSpPr>
         <p:spPr>
           <a:xfrm>
-            <a:off x="7324161" y="4617720"/>
-            <a:ext cx="1907987" cy="1188720"/>
+            <a:off x="7324161" y="4892040"/>
+            <a:ext cx="1907987" cy="1097280"/>
           </a:xfrm>
           <a:prstGeom prst="rect">
             <a:avLst/>
@@ -6879,8 +6879,8 @@
         </p:nvSpPr>
         <p:spPr>
           <a:xfrm>
-            <a:off x="9506468" y="4617720"/>
-            <a:ext cx="1907987" cy="1188720"/>
+            <a:off x="9506468" y="4892040"/>
+            <a:ext cx="1907987" cy="1097280"/>
           </a:xfrm>
           <a:prstGeom prst="rect">
             <a:avLst/>
@@ -6947,7 +6947,7 @@
                 </a:solidFill>
                 <a:latin typeface="Segoe UI"/>
               </a:rPr>
-              <a:t>synthetic records</a:t>
+              <a:t>records we fabricated</a:t>
             </a:r>
           </a:p>
         </p:txBody>
@@ -6989,7 +6989,7 @@
                 </a:solidFill>
                 <a:latin typeface="Segoe UI"/>
               </a:rPr>
-              <a:t>Honest caveat, stated in the product: complaint dates are when the regulator received them, which lags the contact by days to weeks.</a:t>
+              <a:t>Honest caveat, stated in the product: complaint dates are when the regulator received them, and the conversation corpus covers a single month, so it carries no trend baseline.</a:t>
             </a:r>
           </a:p>
         </p:txBody>
@@ -7246,7 +7246,7 @@
                 </a:solidFill>
                 <a:latin typeface="Segoe UI"/>
               </a:rPr>
-              <a:t>99.7%</a:t>
+              <a:t>99.5%</a:t>
             </a:r>
           </a:p>
           <a:p>
@@ -7410,7 +7410,7 @@
                 </a:solidFill>
                 <a:latin typeface="Segoe UI"/>
               </a:rPr>
-              <a:t>1.32</a:t>
+              <a:t>1.37</a:t>
             </a:r>
           </a:p>
           <a:p>
@@ -7491,7 +7491,7 @@
                 </a:solidFill>
                 <a:latin typeface="Segoe UI"/>
               </a:rPr>
-              <a:t>1.3%</a:t>
+              <a:t>1.4%</a:t>
             </a:r>
           </a:p>
           <a:p>
@@ -7573,7 +7573,7 @@
                 </a:solidFill>
                 <a:latin typeface="Segoe UI"/>
               </a:rPr>
-              <a:t>97.2%</a:t>
+              <a:t>85.2%</a:t>
             </a:r>
           </a:p>
           <a:p>
@@ -7830,7 +7830,7 @@
                 </a:solidFill>
                 <a:latin typeface="Segoe UI"/>
               </a:rPr>
-              <a:t>Re-judging a 10% sample independently agreed with the original assignment 88.1% of the time. 781 statements fit nothing and were left unplaced rather than forced; they count in every total but are never ranked or flagged.</a:t>
+              <a:t>Re-judging a 10% sample independently agreed with the original assignment 88.1% of the time. 1742 statements fit nothing and were left unplaced rather than forced; they count in every total but are never ranked or flagged.</a:t>
             </a:r>
           </a:p>
         </p:txBody>
@@ -7892,7 +7892,7 @@
                 </a:solidFill>
                 <a:latin typeface="Segoe UI"/>
               </a:rPr>
-              <a:t>5,827</a:t>
+              <a:t>7,417</a:t>
             </a:r>
           </a:p>
           <a:p>
@@ -8054,7 +8054,7 @@
                 </a:solidFill>
                 <a:latin typeface="Segoe UI"/>
               </a:rPr>
-              <a:t>128</a:t>
+              <a:t>227</a:t>
             </a:r>
           </a:p>
           <a:p>
@@ -8135,7 +8135,7 @@
                 </a:solidFill>
                 <a:latin typeface="Segoe UI"/>
               </a:rPr>
-              <a:t>1,478</a:t>
+              <a:t>1,875</a:t>
             </a:r>
           </a:p>
           <a:p>
@@ -8364,7 +8364,7 @@
                 </a:solidFill>
                 <a:latin typeface="Segoe UI"/>
               </a:rPr>
-              <a:t>The same problem, in 397 different wordings</a:t>
+              <a:t>The same problem, in 381 different wordings</a:t>
             </a:r>
           </a:p>
         </p:txBody>
@@ -8441,7 +8441,7 @@
                 </a:solidFill>
                 <a:latin typeface="Segoe UI"/>
               </a:rPr>
-              <a:t>Fraud dispute denied without reviewing the evidence</a:t>
+              <a:t>Fraud and dispute claims denied despite evidence</a:t>
             </a:r>
           </a:p>
           <a:p>
@@ -8460,7 +8460,7 @@
                 </a:solidFill>
                 <a:latin typeface="Segoe UI"/>
               </a:rPr>
-              <a:t>394 contacts  ·  397 distinct wordings  ·  6 products  ·  41 states  ·  8.9% of everything that came in</a:t>
+              <a:t>379 contacts  ·  381 distinct wordings  ·  6 products  ·  41 states  ·  7.0% of everything that came in</a:t>
             </a:r>
           </a:p>
         </p:txBody>
@@ -8522,7 +8522,7 @@
                 </a:solidFill>
                 <a:latin typeface="Segoe UI"/>
               </a:rPr>
-              <a:t>“The bank told the customer that reviewing the ATM and drive-thru cameras that could confirm the deposit would require a lawyer and a court order.”</a:t>
+              <a:t>“The bank requires initiating a dispute process and cannot immediately refund unauthorized pre-authorized debits without proof of fraudulent transactions.”</a:t>
             </a:r>
           </a:p>
         </p:txBody>
@@ -8628,7 +8628,7 @@
                 </a:solidFill>
                 <a:latin typeface="Segoe UI"/>
               </a:rPr>
-              <a:t>“$650.00 in unauthorized transactions were denied twice within about 48 hours each, based solely on a mistaken lost-card date entered in the app, without contacting the customer or the merchant.”</a:t>
+              <a:t>“Chase closed my claim for the misdirected funds because it wasn't reported within 5 days, even though Chase itself had been insisting the payment went to the right place during that window.”</a:t>
             </a:r>
           </a:p>
         </p:txBody>
@@ -8734,7 +8734,7 @@
                 </a:solidFill>
                 <a:latin typeface="Segoe UI"/>
               </a:rPr>
-              <a:t>“The claim's document upload process was unavailable until after the weekend, and by the time it became accessible the claim had already been closed.”</a:t>
+              <a:t>“The customer disputed the fabricated charges with the card issuer, but the outcome so far shows no credit given.”</a:t>
             </a:r>
           </a:p>
         </p:txBody>
@@ -8862,7 +8862,7 @@
                 </a:solidFill>
                 <a:latin typeface="Segoe UI"/>
               </a:rPr>
-              <a:t>The ratio holds down the whole top ten: 397 wordings over 394 contacts at the top, 99 over 97 at the tenth.</a:t>
+              <a:t>The ratio holds down the whole top ten: 381 wordings over 379 contacts at the top, 109 over 108 at the tenth.</a:t>
             </a:r>
           </a:p>
         </p:txBody>
@@ -9282,7 +9282,7 @@
                 </a:solidFill>
                 <a:latin typeface="Segoe UI"/>
               </a:rPr>
-              <a:t>Fraud dispute denied without reviewing the evidence</a:t>
+              <a:t>Fraud and dispute claims denied despite evidence</a:t>
             </a:r>
           </a:p>
         </p:txBody>
@@ -9324,7 +9324,7 @@
                 </a:solidFill>
                 <a:latin typeface="Segoe UI"/>
               </a:rPr>
-              <a:t>394</a:t>
+              <a:t>379</a:t>
             </a:r>
           </a:p>
         </p:txBody>
@@ -9366,7 +9366,7 @@
                 </a:solidFill>
                 <a:latin typeface="Segoe UI"/>
               </a:rPr>
-              <a:t>397</a:t>
+              <a:t>381</a:t>
             </a:r>
           </a:p>
         </p:txBody>
@@ -9485,7 +9485,7 @@
                 </a:solidFill>
                 <a:latin typeface="Segoe UI"/>
               </a:rPr>
-              <a:t>Account closed and the bank will not say why</a:t>
+              <a:t>Unexplained account closures or restrictions</a:t>
             </a:r>
           </a:p>
         </p:txBody>
@@ -9527,7 +9527,7 @@
                 </a:solidFill>
                 <a:latin typeface="Segoe UI"/>
               </a:rPr>
-              <a:t>314</a:t>
+              <a:t>353</a:t>
             </a:r>
           </a:p>
         </p:txBody>
@@ -9569,7 +9569,7 @@
                 </a:solidFill>
                 <a:latin typeface="Segoe UI"/>
               </a:rPr>
-              <a:t>320</a:t>
+              <a:t>364</a:t>
             </a:r>
           </a:p>
         </p:txBody>
@@ -9611,7 +9611,7 @@
                 </a:solidFill>
                 <a:latin typeface="Segoe UI"/>
               </a:rPr>
-              <a:t>4</a:t>
+              <a:t>5</a:t>
             </a:r>
           </a:p>
         </p:txBody>
@@ -9688,7 +9688,7 @@
                 </a:solidFill>
                 <a:latin typeface="Segoe UI"/>
               </a:rPr>
-              <a:t>Processing mistake stays uncorrected after being reported</a:t>
+              <a:t>Contradictory information from bank representatives</a:t>
             </a:r>
           </a:p>
         </p:txBody>
@@ -9730,7 +9730,7 @@
                 </a:solidFill>
                 <a:latin typeface="Segoe UI"/>
               </a:rPr>
-              <a:t>226</a:t>
+              <a:t>281</a:t>
             </a:r>
           </a:p>
         </p:txBody>
@@ -9772,7 +9772,7 @@
                 </a:solidFill>
                 <a:latin typeface="Segoe UI"/>
               </a:rPr>
-              <a:t>235</a:t>
+              <a:t>282</a:t>
             </a:r>
           </a:p>
         </p:txBody>
@@ -9891,7 +9891,7 @@
                 </a:solidFill>
                 <a:latin typeface="Segoe UI"/>
               </a:rPr>
-              <a:t>Scam tricks the customer into sending the money</a:t>
+              <a:t>Unexplained decisions on auto charge-offs and fees</a:t>
             </a:r>
           </a:p>
         </p:txBody>
@@ -9933,7 +9933,7 @@
                 </a:solidFill>
                 <a:latin typeface="Segoe UI"/>
               </a:rPr>
-              <a:t>214</a:t>
+              <a:t>201</a:t>
             </a:r>
           </a:p>
         </p:txBody>
@@ -9975,7 +9975,7 @@
                 </a:solidFill>
                 <a:latin typeface="Segoe UI"/>
               </a:rPr>
-              <a:t>219</a:t>
+              <a:t>201</a:t>
             </a:r>
           </a:p>
         </p:txBody>
@@ -10017,7 +10017,7 @@
                 </a:solidFill>
                 <a:latin typeface="Segoe UI"/>
               </a:rPr>
-              <a:t>5</a:t>
+              <a:t>8</a:t>
             </a:r>
           </a:p>
         </p:txBody>
@@ -10094,7 +10094,7 @@
                 </a:solidFill>
                 <a:latin typeface="Segoe UI"/>
               </a:rPr>
-              <a:t>Red flags and evidence of fraud are not acted on</a:t>
+              <a:t>Fraud monitoring failed to stop unauthorized transfers</a:t>
             </a:r>
           </a:p>
         </p:txBody>
@@ -10136,7 +10136,7 @@
                 </a:solidFill>
                 <a:latin typeface="Segoe UI"/>
               </a:rPr>
-              <a:t>203</a:t>
+              <a:t>189</a:t>
             </a:r>
           </a:p>
         </p:txBody>
@@ -10178,7 +10178,7 @@
                 </a:solidFill>
                 <a:latin typeface="Segoe UI"/>
               </a:rPr>
-              <a:t>205</a:t>
+              <a:t>189</a:t>
             </a:r>
           </a:p>
         </p:txBody>
@@ -10220,7 +10220,7 @@
                 </a:solidFill>
                 <a:latin typeface="Segoe UI"/>
               </a:rPr>
-              <a:t>5</a:t>
+              <a:t>6</a:t>
             </a:r>
           </a:p>
         </p:txBody>
@@ -10480,7 +10480,7 @@
                 </a:solidFill>
                 <a:latin typeface="Segoe UI"/>
               </a:rPr>
-              <a:t>Replaying one real theme week by week: “Claim investigation runs past its deadline with no status”</a:t>
+              <a:t>Replaying one real theme week by week: “Scam claim denied because transfer was customer-initiated”</a:t>
             </a:r>
           </a:p>
         </p:txBody>
@@ -10776,7 +10776,7 @@
                 </a:solidFill>
                 <a:latin typeface="Segoe UI"/>
               </a:rPr>
-              <a:t>2025-W38</a:t>
+              <a:t>2024-W47</a:t>
             </a:r>
           </a:p>
         </p:txBody>
@@ -10818,7 +10818,7 @@
                 </a:solidFill>
                 <a:latin typeface="Segoe UI"/>
               </a:rPr>
-              <a:t>1</a:t>
+              <a:t>4</a:t>
             </a:r>
           </a:p>
         </p:txBody>
@@ -10860,7 +10860,7 @@
                 </a:solidFill>
                 <a:latin typeface="Segoe UI"/>
               </a:rPr>
-              <a:t>3.2</a:t>
+              <a:t>1.4</a:t>
             </a:r>
           </a:p>
         </p:txBody>
@@ -10902,7 +10902,7 @@
                 </a:solidFill>
                 <a:latin typeface="Segoe UI"/>
               </a:rPr>
-              <a:t>-1.14</a:t>
+              <a:t>1.91</a:t>
             </a:r>
           </a:p>
         </p:txBody>
@@ -11021,7 +11021,7 @@
                 </a:solidFill>
                 <a:latin typeface="Segoe UI"/>
               </a:rPr>
-              <a:t>2025-W39</a:t>
+              <a:t>2024-W48</a:t>
             </a:r>
           </a:p>
         </p:txBody>
@@ -11105,7 +11105,7 @@
                 </a:solidFill>
                 <a:latin typeface="Segoe UI"/>
               </a:rPr>
-              <a:t>2.9</a:t>
+              <a:t>1.6</a:t>
             </a:r>
           </a:p>
         </p:txBody>
@@ -11147,7 +11147,7 @@
                 </a:solidFill>
                 <a:latin typeface="Segoe UI"/>
               </a:rPr>
-              <a:t>0.04</a:t>
+              <a:t>0.95</a:t>
             </a:r>
           </a:p>
         </p:txBody>
@@ -11310,7 +11310,7 @@
                 </a:solidFill>
                 <a:latin typeface="Segoe UI"/>
               </a:rPr>
-              <a:t>2025-W40</a:t>
+              <a:t>2024-W49</a:t>
             </a:r>
           </a:p>
         </p:txBody>
@@ -11352,7 +11352,7 @@
                 </a:solidFill>
                 <a:latin typeface="Segoe UI"/>
               </a:rPr>
-              <a:t>6</a:t>
+              <a:t>7</a:t>
             </a:r>
           </a:p>
         </p:txBody>
@@ -11394,7 +11394,7 @@
                 </a:solidFill>
                 <a:latin typeface="Segoe UI"/>
               </a:rPr>
-              <a:t>1.9</a:t>
+              <a:t>1.5</a:t>
             </a:r>
           </a:p>
         </p:txBody>
@@ -11436,7 +11436,7 @@
                 </a:solidFill>
                 <a:latin typeface="Segoe UI"/>
               </a:rPr>
-              <a:t>2.63</a:t>
+              <a:t>3.93</a:t>
             </a:r>
           </a:p>
         </p:txBody>
@@ -11478,7 +11478,7 @@
                 </a:solidFill>
                 <a:latin typeface="Segoe UI"/>
               </a:rPr>
-              <a:t>emerging</a:t>
+              <a:t>growing</a:t>
             </a:r>
           </a:p>
         </p:txBody>
@@ -11599,7 +11599,7 @@
                 </a:solidFill>
                 <a:latin typeface="Segoe UI"/>
               </a:rPr>
-              <a:t>2025-W41</a:t>
+              <a:t>2024-W50</a:t>
             </a:r>
           </a:p>
         </p:txBody>
@@ -11641,7 +11641,7 @@
                 </a:solidFill>
                 <a:latin typeface="Segoe UI"/>
               </a:rPr>
-              <a:t>8</a:t>
+              <a:t>6</a:t>
             </a:r>
           </a:p>
         </p:txBody>
@@ -11725,7 +11725,7 @@
                 </a:solidFill>
                 <a:latin typeface="Segoe UI"/>
               </a:rPr>
-              <a:t>4.16</a:t>
+              <a:t>2.73</a:t>
             </a:r>
           </a:p>
         </p:txBody>
@@ -11888,7 +11888,7 @@
                 </a:solidFill>
                 <a:latin typeface="Segoe UI"/>
               </a:rPr>
-              <a:t>2025-W42</a:t>
+              <a:t>2024-W51</a:t>
             </a:r>
           </a:p>
         </p:txBody>
@@ -11930,7 +11930,7 @@
                 </a:solidFill>
                 <a:latin typeface="Segoe UI"/>
               </a:rPr>
-              <a:t>9</a:t>
+              <a:t>7</a:t>
             </a:r>
           </a:p>
         </p:txBody>
@@ -11972,7 +11972,7 @@
                 </a:solidFill>
                 <a:latin typeface="Segoe UI"/>
               </a:rPr>
-              <a:t>2.1</a:t>
+              <a:t>2.5</a:t>
             </a:r>
           </a:p>
         </p:txBody>
@@ -12014,7 +12014,7 @@
                 </a:solidFill>
                 <a:latin typeface="Segoe UI"/>
               </a:rPr>
-              <a:t>4.33</a:t>
+              <a:t>2.58</a:t>
             </a:r>
           </a:p>
         </p:txBody>
@@ -12056,7 +12056,7 @@
                 </a:solidFill>
                 <a:latin typeface="Segoe UI"/>
               </a:rPr>
-              <a:t>growing</a:t>
+              <a:t>emerging</a:t>
             </a:r>
           </a:p>
         </p:txBody>
@@ -12177,7 +12177,7 @@
                 </a:solidFill>
                 <a:latin typeface="Segoe UI"/>
               </a:rPr>
-              <a:t>2025-W43</a:t>
+              <a:t>2024-W52</a:t>
             </a:r>
           </a:p>
         </p:txBody>
@@ -12261,7 +12261,7 @@
                 </a:solidFill>
                 <a:latin typeface="Segoe UI"/>
               </a:rPr>
-              <a:t>2.1</a:t>
+              <a:t>2.3</a:t>
             </a:r>
           </a:p>
         </p:txBody>
@@ -12303,7 +12303,7 @@
                 </a:solidFill>
                 <a:latin typeface="Segoe UI"/>
               </a:rPr>
-              <a:t>3.01</a:t>
+              <a:t>2.82</a:t>
             </a:r>
           </a:p>
         </p:txBody>
@@ -12387,51 +12387,7 @@
       </p:cxnSp>
       <p:sp>
         <p:nvSpPr>
-          <p:cNvPr id="51" name="Rectangle 50"/>
-          <p:cNvSpPr/>
-          <p:nvPr/>
-        </p:nvSpPr>
-        <p:spPr>
-          <a:xfrm>
-            <a:off x="777240" y="5038344"/>
-            <a:ext cx="10607040" cy="347472"/>
-          </a:xfrm>
-          <a:prstGeom prst="rect">
-            <a:avLst/>
-          </a:prstGeom>
-          <a:solidFill>
-            <a:srgbClr val="FBEEE9"/>
-          </a:solidFill>
-          <a:ln>
-            <a:noFill/>
-          </a:ln>
-          <a:effectLst/>
-        </p:spPr>
-        <p:style>
-          <a:lnRef idx="1">
-            <a:schemeClr val="accent1"/>
-          </a:lnRef>
-          <a:fillRef idx="3">
-            <a:schemeClr val="accent1"/>
-          </a:fillRef>
-          <a:effectRef idx="2">
-            <a:schemeClr val="accent1"/>
-          </a:effectRef>
-          <a:fontRef idx="minor">
-            <a:schemeClr val="lt1"/>
-          </a:fontRef>
-        </p:style>
-        <p:txBody>
-          <a:bodyPr rtlCol="0" anchor="ctr"/>
-          <a:lstStyle/>
-          <a:p>
-            <a:pPr algn="ctr"/>
-          </a:p>
-        </p:txBody>
-      </p:sp>
-      <p:sp>
-        <p:nvSpPr>
-          <p:cNvPr id="52" name="TextBox 51"/>
+          <p:cNvPr id="51" name="TextBox 50"/>
           <p:cNvSpPr txBox="1"/>
           <p:nvPr/>
         </p:nvSpPr>
@@ -12460,20 +12416,20 @@
               </a:spcAft>
             </a:pPr>
             <a:r>
-              <a:rPr sz="1300" b="1" i="0">
-                <a:solidFill>
-                  <a:srgbClr val="C2411F"/>
-                </a:solidFill>
-                <a:latin typeface="Segoe UI"/>
-              </a:rPr>
-              <a:t>2025-W44</a:t>
-            </a:r>
-          </a:p>
-        </p:txBody>
-      </p:sp>
-      <p:sp>
-        <p:nvSpPr>
-          <p:cNvPr id="53" name="TextBox 52"/>
+              <a:rPr sz="1300" b="0" i="0">
+                <a:solidFill>
+                  <a:srgbClr val="14171C"/>
+                </a:solidFill>
+                <a:latin typeface="Segoe UI"/>
+              </a:rPr>
+              <a:t>2025-W01</a:t>
+            </a:r>
+          </a:p>
+        </p:txBody>
+      </p:sp>
+      <p:sp>
+        <p:nvSpPr>
+          <p:cNvPr id="52" name="TextBox 51"/>
           <p:cNvSpPr txBox="1"/>
           <p:nvPr/>
         </p:nvSpPr>
@@ -12504,18 +12460,18 @@
             <a:r>
               <a:rPr sz="1300" b="0" i="0">
                 <a:solidFill>
-                  <a:srgbClr val="C2411F"/>
-                </a:solidFill>
-                <a:latin typeface="Segoe UI"/>
-              </a:rPr>
-              <a:t>8</a:t>
-            </a:r>
-          </a:p>
-        </p:txBody>
-      </p:sp>
-      <p:sp>
-        <p:nvSpPr>
-          <p:cNvPr id="54" name="TextBox 53"/>
+                  <a:srgbClr val="6B7280"/>
+                </a:solidFill>
+                <a:latin typeface="Segoe UI"/>
+              </a:rPr>
+              <a:t>3</a:t>
+            </a:r>
+          </a:p>
+        </p:txBody>
+      </p:sp>
+      <p:sp>
+        <p:nvSpPr>
+          <p:cNvPr id="53" name="TextBox 52"/>
           <p:cNvSpPr txBox="1"/>
           <p:nvPr/>
         </p:nvSpPr>
@@ -12546,18 +12502,18 @@
             <a:r>
               <a:rPr sz="1300" b="0" i="0">
                 <a:solidFill>
-                  <a:srgbClr val="C2411F"/>
-                </a:solidFill>
-                <a:latin typeface="Segoe UI"/>
-              </a:rPr>
-              <a:t>2.6</a:t>
-            </a:r>
-          </a:p>
-        </p:txBody>
-      </p:sp>
-      <p:sp>
-        <p:nvSpPr>
-          <p:cNvPr id="55" name="TextBox 54"/>
+                  <a:srgbClr val="6B7280"/>
+                </a:solidFill>
+                <a:latin typeface="Segoe UI"/>
+              </a:rPr>
+              <a:t>3.3</a:t>
+            </a:r>
+          </a:p>
+        </p:txBody>
+      </p:sp>
+      <p:sp>
+        <p:nvSpPr>
+          <p:cNvPr id="54" name="TextBox 53"/>
           <p:cNvSpPr txBox="1"/>
           <p:nvPr/>
         </p:nvSpPr>
@@ -12588,18 +12544,18 @@
             <a:r>
               <a:rPr sz="1300" b="0" i="0">
                 <a:solidFill>
-                  <a:srgbClr val="C2411F"/>
-                </a:solidFill>
-                <a:latin typeface="Segoe UI"/>
-              </a:rPr>
-              <a:t>3.08</a:t>
-            </a:r>
-          </a:p>
-        </p:txBody>
-      </p:sp>
-      <p:sp>
-        <p:nvSpPr>
-          <p:cNvPr id="56" name="TextBox 55"/>
+                  <a:srgbClr val="6B7280"/>
+                </a:solidFill>
+                <a:latin typeface="Segoe UI"/>
+              </a:rPr>
+              <a:t>-0.16</a:t>
+            </a:r>
+          </a:p>
+        </p:txBody>
+      </p:sp>
+      <p:sp>
+        <p:nvSpPr>
+          <p:cNvPr id="55" name="TextBox 54"/>
           <p:cNvSpPr txBox="1"/>
           <p:nvPr/>
         </p:nvSpPr>
@@ -12630,18 +12586,18 @@
             <a:r>
               <a:rPr sz="1300" b="0" i="0">
                 <a:solidFill>
-                  <a:srgbClr val="C2411F"/>
-                </a:solidFill>
-                <a:latin typeface="Segoe UI"/>
-              </a:rPr>
-              <a:t>emerging</a:t>
+                  <a:srgbClr val="6B7280"/>
+                </a:solidFill>
+                <a:latin typeface="Segoe UI"/>
+              </a:rPr>
+              <a:t>below threshold</a:t>
             </a:r>
           </a:p>
         </p:txBody>
       </p:sp>
       <p:cxnSp>
         <p:nvCxnSpPr>
-          <p:cNvPr id="57" name="Connector 56"/>
+          <p:cNvPr id="56" name="Connector 55"/>
           <p:cNvCxnSpPr/>
           <p:nvPr/>
         </p:nvCxnSpPr>
@@ -12676,7 +12632,7 @@
       </p:cxnSp>
       <p:sp>
         <p:nvSpPr>
-          <p:cNvPr id="58" name="TextBox 57"/>
+          <p:cNvPr id="57" name="TextBox 56"/>
           <p:cNvSpPr txBox="1"/>
           <p:nvPr/>
         </p:nvSpPr>
@@ -12711,14 +12667,14 @@
                 </a:solidFill>
                 <a:latin typeface="Segoe UI"/>
               </a:rPr>
-              <a:t>2025-W45</a:t>
-            </a:r>
-          </a:p>
-        </p:txBody>
-      </p:sp>
-      <p:sp>
-        <p:nvSpPr>
-          <p:cNvPr id="59" name="TextBox 58"/>
+              <a:t>2025-W02</a:t>
+            </a:r>
+          </a:p>
+        </p:txBody>
+      </p:sp>
+      <p:sp>
+        <p:nvSpPr>
+          <p:cNvPr id="58" name="TextBox 57"/>
           <p:cNvSpPr txBox="1"/>
           <p:nvPr/>
         </p:nvSpPr>
@@ -12753,14 +12709,14 @@
                 </a:solidFill>
                 <a:latin typeface="Segoe UI"/>
               </a:rPr>
-              <a:t>7</a:t>
-            </a:r>
-          </a:p>
-        </p:txBody>
-      </p:sp>
-      <p:sp>
-        <p:nvSpPr>
-          <p:cNvPr id="60" name="TextBox 59"/>
+              <a:t>5</a:t>
+            </a:r>
+          </a:p>
+        </p:txBody>
+      </p:sp>
+      <p:sp>
+        <p:nvSpPr>
+          <p:cNvPr id="59" name="TextBox 58"/>
           <p:cNvSpPr txBox="1"/>
           <p:nvPr/>
         </p:nvSpPr>
@@ -12795,14 +12751,14 @@
                 </a:solidFill>
                 <a:latin typeface="Segoe UI"/>
               </a:rPr>
-              <a:t>3.3</a:t>
-            </a:r>
-          </a:p>
-        </p:txBody>
-      </p:sp>
-      <p:sp>
-        <p:nvSpPr>
-          <p:cNvPr id="61" name="TextBox 60"/>
+              <a:t>3.6</a:t>
+            </a:r>
+          </a:p>
+        </p:txBody>
+      </p:sp>
+      <p:sp>
+        <p:nvSpPr>
+          <p:cNvPr id="60" name="TextBox 59"/>
           <p:cNvSpPr txBox="1"/>
           <p:nvPr/>
         </p:nvSpPr>
@@ -12837,14 +12793,14 @@
                 </a:solidFill>
                 <a:latin typeface="Segoe UI"/>
               </a:rPr>
-              <a:t>1.86</a:t>
-            </a:r>
-          </a:p>
-        </p:txBody>
-      </p:sp>
-      <p:sp>
-        <p:nvSpPr>
-          <p:cNvPr id="62" name="TextBox 61"/>
+              <a:t>0.69</a:t>
+            </a:r>
+          </a:p>
+        </p:txBody>
+      </p:sp>
+      <p:sp>
+        <p:nvSpPr>
+          <p:cNvPr id="61" name="TextBox 60"/>
           <p:cNvSpPr txBox="1"/>
           <p:nvPr/>
         </p:nvSpPr>
@@ -12886,7 +12842,7 @@
       </p:sp>
       <p:cxnSp>
         <p:nvCxnSpPr>
-          <p:cNvPr id="63" name="Connector 62"/>
+          <p:cNvPr id="62" name="Connector 61"/>
           <p:cNvCxnSpPr/>
           <p:nvPr/>
         </p:nvCxnSpPr>
@@ -12921,7 +12877,7 @@
       </p:cxnSp>
       <p:sp>
         <p:nvSpPr>
-          <p:cNvPr id="64" name="TextBox 63"/>
+          <p:cNvPr id="63" name="TextBox 62"/>
           <p:cNvSpPr txBox="1"/>
           <p:nvPr/>
         </p:nvSpPr>
@@ -12956,7 +12912,7 @@
                 </a:solidFill>
                 <a:latin typeface="Segoe UI"/>
               </a:rPr>
-              <a:t>Quiet, quiet, then six contacts against two expected, and it fires.</a:t>
+              <a:t>Quiet, quiet, then 7 contacts against 1.5 expected, and it fires.</a:t>
             </a:r>
           </a:p>
           <a:p>

--- a/docs/voc_insights_deck.pptx
+++ b/docs/voc_insights_deck.pptx
@@ -3635,7 +3635,7 @@
                 </a:solidFill>
                 <a:latin typeface="Segoe UI"/>
               </a:rPr>
-              <a:t>83</a:t>
+              <a:t>126</a:t>
             </a:r>
           </a:p>
           <a:p>
@@ -3716,7 +3716,7 @@
                 </a:solidFill>
                 <a:latin typeface="Segoe UI"/>
               </a:rPr>
-              <a:t>80</a:t>
+              <a:t>123</a:t>
             </a:r>
           </a:p>
           <a:p>
@@ -3797,7 +3797,7 @@
                 </a:solidFill>
                 <a:latin typeface="Segoe UI"/>
               </a:rPr>
-              <a:t>80</a:t>
+              <a:t>128</a:t>
             </a:r>
           </a:p>
           <a:p>
@@ -5698,7 +5698,7 @@
                 </a:solidFill>
                 <a:latin typeface="Segoe UI"/>
               </a:rPr>
-              <a:t>379 people describing one fixable failure in 381 different ways, named as one work item with an owner.</a:t>
+              <a:t>407 people describing one fixable failure in 417 different ways, named as one work item with an owner.</a:t>
             </a:r>
           </a:p>
         </p:txBody>
@@ -7830,7 +7830,7 @@
                 </a:solidFill>
                 <a:latin typeface="Segoe UI"/>
               </a:rPr>
-              <a:t>Re-judging a 10% sample independently agreed with the original assignment 88.1% of the time. 1742 statements fit nothing and were left unplaced rather than forced; they count in every total but are never ranked or flagged.</a:t>
+              <a:t>Re-judging a 10% sample independently agreed with the original assignment 88.1% of the time. 1227 statements fit nothing and were left unplaced rather than forced; they count in every total but are never ranked or flagged.</a:t>
             </a:r>
           </a:p>
         </p:txBody>
@@ -8135,7 +8135,7 @@
                 </a:solidFill>
                 <a:latin typeface="Segoe UI"/>
               </a:rPr>
-              <a:t>1,875</a:t>
+              <a:t>2,253</a:t>
             </a:r>
           </a:p>
           <a:p>
@@ -8364,7 +8364,7 @@
                 </a:solidFill>
                 <a:latin typeface="Segoe UI"/>
               </a:rPr>
-              <a:t>The same problem, in 381 different wordings</a:t>
+              <a:t>The same problem, in 417 different wordings</a:t>
             </a:r>
           </a:p>
         </p:txBody>
@@ -8441,7 +8441,7 @@
                 </a:solidFill>
                 <a:latin typeface="Segoe UI"/>
               </a:rPr>
-              <a:t>Fraud and dispute claims denied despite evidence</a:t>
+              <a:t>Unexplained account closures or restrictions</a:t>
             </a:r>
           </a:p>
           <a:p>
@@ -8460,7 +8460,7 @@
                 </a:solidFill>
                 <a:latin typeface="Segoe UI"/>
               </a:rPr>
-              <a:t>379 contacts  ·  381 distinct wordings  ·  6 products  ·  41 states  ·  7.0% of everything that came in</a:t>
+              <a:t>407 contacts  ·  417 distinct wordings  ·  7 products  ·  37 states  ·  7.5% of everything that came in</a:t>
             </a:r>
           </a:p>
         </p:txBody>
@@ -8522,7 +8522,7 @@
                 </a:solidFill>
                 <a:latin typeface="Segoe UI"/>
               </a:rPr>
-              <a:t>“The bank requires initiating a dispute process and cannot immediately refund unauthorized pre-authorized debits without proof of fraudulent transactions.”</a:t>
+              <a:t>“Customer's account services were suspended by the system for security reasons, preventing access online and via the mobile app, but the agent resolved the issue.”</a:t>
             </a:r>
           </a:p>
         </p:txBody>
@@ -8628,7 +8628,7 @@
                 </a:solidFill>
                 <a:latin typeface="Segoe UI"/>
               </a:rPr>
-              <a:t>“Chase closed my claim for the misdirected funds because it wasn't reported within 5 days, even though Chase itself had been insisting the payment went to the right place during that window.”</a:t>
+              <a:t>“An incoming pension wire transfer has been stopped since the fourth quarter of 2024, despite the State Department stating that pensions are not subject to sanctions.”</a:t>
             </a:r>
           </a:p>
         </p:txBody>
@@ -8734,7 +8734,7 @@
                 </a:solidFill>
                 <a:latin typeface="Segoe UI"/>
               </a:rPr>
-              <a:t>“The customer disputed the fabricated charges with the card issuer, but the outcome so far shows no credit given.”</a:t>
+              <a:t>“A legitimate split kitchen cabinet purchase was declined twice as suspected fraud or identity theft, even after being assured the card would work.”</a:t>
             </a:r>
           </a:p>
         </p:txBody>
@@ -8862,7 +8862,7 @@
                 </a:solidFill>
                 <a:latin typeface="Segoe UI"/>
               </a:rPr>
-              <a:t>The ratio holds down the whole top ten: 381 wordings over 379 contacts at the top, 109 over 108 at the tenth.</a:t>
+              <a:t>The ratio holds down the whole top ten: 417 wordings over 407 contacts at the top, 97 over 97 at the tenth.</a:t>
             </a:r>
           </a:p>
         </p:txBody>
@@ -9282,7 +9282,7 @@
                 </a:solidFill>
                 <a:latin typeface="Segoe UI"/>
               </a:rPr>
-              <a:t>Fraud and dispute claims denied despite evidence</a:t>
+              <a:t>Unexplained account closures or restrictions</a:t>
             </a:r>
           </a:p>
         </p:txBody>
@@ -9324,7 +9324,7 @@
                 </a:solidFill>
                 <a:latin typeface="Segoe UI"/>
               </a:rPr>
-              <a:t>379</a:t>
+              <a:t>407</a:t>
             </a:r>
           </a:p>
         </p:txBody>
@@ -9366,7 +9366,7 @@
                 </a:solidFill>
                 <a:latin typeface="Segoe UI"/>
               </a:rPr>
-              <a:t>381</a:t>
+              <a:t>417</a:t>
             </a:r>
           </a:p>
         </p:txBody>
@@ -9408,7 +9408,7 @@
                 </a:solidFill>
                 <a:latin typeface="Segoe UI"/>
               </a:rPr>
-              <a:t>6</a:t>
+              <a:t>7</a:t>
             </a:r>
           </a:p>
         </p:txBody>
@@ -9485,7 +9485,7 @@
                 </a:solidFill>
                 <a:latin typeface="Segoe UI"/>
               </a:rPr>
-              <a:t>Unexplained account closures or restrictions</a:t>
+              <a:t>Fraud and dispute claims denied despite evidence</a:t>
             </a:r>
           </a:p>
         </p:txBody>
@@ -9527,7 +9527,7 @@
                 </a:solidFill>
                 <a:latin typeface="Segoe UI"/>
               </a:rPr>
-              <a:t>353</a:t>
+              <a:t>396</a:t>
             </a:r>
           </a:p>
         </p:txBody>
@@ -9569,7 +9569,7 @@
                 </a:solidFill>
                 <a:latin typeface="Segoe UI"/>
               </a:rPr>
-              <a:t>364</a:t>
+              <a:t>398</a:t>
             </a:r>
           </a:p>
         </p:txBody>
@@ -9611,7 +9611,7 @@
                 </a:solidFill>
                 <a:latin typeface="Segoe UI"/>
               </a:rPr>
-              <a:t>5</a:t>
+              <a:t>7</a:t>
             </a:r>
           </a:p>
         </p:txBody>
@@ -9730,7 +9730,7 @@
                 </a:solidFill>
                 <a:latin typeface="Segoe UI"/>
               </a:rPr>
-              <a:t>281</a:t>
+              <a:t>383</a:t>
             </a:r>
           </a:p>
         </p:txBody>
@@ -9772,7 +9772,7 @@
                 </a:solidFill>
                 <a:latin typeface="Segoe UI"/>
               </a:rPr>
-              <a:t>282</a:t>
+              <a:t>389</a:t>
             </a:r>
           </a:p>
         </p:txBody>
@@ -9933,7 +9933,7 @@
                 </a:solidFill>
                 <a:latin typeface="Segoe UI"/>
               </a:rPr>
-              <a:t>201</a:t>
+              <a:t>134</a:t>
             </a:r>
           </a:p>
         </p:txBody>
@@ -9975,7 +9975,7 @@
                 </a:solidFill>
                 <a:latin typeface="Segoe UI"/>
               </a:rPr>
-              <a:t>201</a:t>
+              <a:t>135</a:t>
             </a:r>
           </a:p>
         </p:txBody>
@@ -10017,7 +10017,7 @@
                 </a:solidFill>
                 <a:latin typeface="Segoe UI"/>
               </a:rPr>
-              <a:t>8</a:t>
+              <a:t>7</a:t>
             </a:r>
           </a:p>
         </p:txBody>
@@ -10094,7 +10094,7 @@
                 </a:solidFill>
                 <a:latin typeface="Segoe UI"/>
               </a:rPr>
-              <a:t>Fraud monitoring failed to stop unauthorized transfers</a:t>
+              <a:t>Account closed and remaining balance not returned</a:t>
             </a:r>
           </a:p>
         </p:txBody>
@@ -10136,7 +10136,7 @@
                 </a:solidFill>
                 <a:latin typeface="Segoe UI"/>
               </a:rPr>
-              <a:t>189</a:t>
+              <a:t>119</a:t>
             </a:r>
           </a:p>
         </p:txBody>
@@ -10178,7 +10178,7 @@
                 </a:solidFill>
                 <a:latin typeface="Segoe UI"/>
               </a:rPr>
-              <a:t>189</a:t>
+              <a:t>121</a:t>
             </a:r>
           </a:p>
         </p:txBody>
@@ -10220,7 +10220,7 @@
                 </a:solidFill>
                 <a:latin typeface="Segoe UI"/>
               </a:rPr>
-              <a:t>6</a:t>
+              <a:t>3</a:t>
             </a:r>
           </a:p>
         </p:txBody>
@@ -10480,7 +10480,7 @@
                 </a:solidFill>
                 <a:latin typeface="Segoe UI"/>
               </a:rPr>
-              <a:t>Replaying one real theme week by week: “Scam claim denied because transfer was customer-initiated”</a:t>
+              <a:t>Replaying one real theme week by week: “Inaccurate negative credit reporting due to bank error”</a:t>
             </a:r>
           </a:p>
         </p:txBody>
@@ -10776,7 +10776,7 @@
                 </a:solidFill>
                 <a:latin typeface="Segoe UI"/>
               </a:rPr>
-              <a:t>2024-W47</a:t>
+              <a:t>2025-W36</a:t>
             </a:r>
           </a:p>
         </p:txBody>
@@ -10818,7 +10818,7 @@
                 </a:solidFill>
                 <a:latin typeface="Segoe UI"/>
               </a:rPr>
-              <a:t>4</a:t>
+              <a:t>3</a:t>
             </a:r>
           </a:p>
         </p:txBody>
@@ -10860,7 +10860,7 @@
                 </a:solidFill>
                 <a:latin typeface="Segoe UI"/>
               </a:rPr>
-              <a:t>1.4</a:t>
+              <a:t>1.2</a:t>
             </a:r>
           </a:p>
         </p:txBody>
@@ -10902,7 +10902,7 @@
                 </a:solidFill>
                 <a:latin typeface="Segoe UI"/>
               </a:rPr>
-              <a:t>1.91</a:t>
+              <a:t>1.35</a:t>
             </a:r>
           </a:p>
         </p:txBody>
@@ -11021,7 +11021,7 @@
                 </a:solidFill>
                 <a:latin typeface="Segoe UI"/>
               </a:rPr>
-              <a:t>2024-W48</a:t>
+              <a:t>2025-W37</a:t>
             </a:r>
           </a:p>
         </p:txBody>
@@ -11105,7 +11105,7 @@
                 </a:solidFill>
                 <a:latin typeface="Segoe UI"/>
               </a:rPr>
-              <a:t>1.6</a:t>
+              <a:t>1.2</a:t>
             </a:r>
           </a:p>
         </p:txBody>
@@ -11147,7 +11147,7 @@
                 </a:solidFill>
                 <a:latin typeface="Segoe UI"/>
               </a:rPr>
-              <a:t>0.95</a:t>
+              <a:t>1.39</a:t>
             </a:r>
           </a:p>
         </p:txBody>
@@ -11310,7 +11310,7 @@
                 </a:solidFill>
                 <a:latin typeface="Segoe UI"/>
               </a:rPr>
-              <a:t>2024-W49</a:t>
+              <a:t>2025-W38</a:t>
             </a:r>
           </a:p>
         </p:txBody>
@@ -11352,7 +11352,7 @@
                 </a:solidFill>
                 <a:latin typeface="Segoe UI"/>
               </a:rPr>
-              <a:t>7</a:t>
+              <a:t>5</a:t>
             </a:r>
           </a:p>
         </p:txBody>
@@ -11394,7 +11394,7 @@
                 </a:solidFill>
                 <a:latin typeface="Segoe UI"/>
               </a:rPr>
-              <a:t>1.5</a:t>
+              <a:t>0.8</a:t>
             </a:r>
           </a:p>
         </p:txBody>
@@ -11436,7 +11436,7 @@
                 </a:solidFill>
                 <a:latin typeface="Segoe UI"/>
               </a:rPr>
-              <a:t>3.93</a:t>
+              <a:t>3.63</a:t>
             </a:r>
           </a:p>
         </p:txBody>
@@ -11478,7 +11478,7 @@
                 </a:solidFill>
                 <a:latin typeface="Segoe UI"/>
               </a:rPr>
-              <a:t>growing</a:t>
+              <a:t>emerging</a:t>
             </a:r>
           </a:p>
         </p:txBody>
@@ -11599,7 +11599,7 @@
                 </a:solidFill>
                 <a:latin typeface="Segoe UI"/>
               </a:rPr>
-              <a:t>2024-W50</a:t>
+              <a:t>2025-W39</a:t>
             </a:r>
           </a:p>
         </p:txBody>
@@ -11641,7 +11641,7 @@
                 </a:solidFill>
                 <a:latin typeface="Segoe UI"/>
               </a:rPr>
-              <a:t>6</a:t>
+              <a:t>5</a:t>
             </a:r>
           </a:p>
         </p:txBody>
@@ -11683,7 +11683,7 @@
                 </a:solidFill>
                 <a:latin typeface="Segoe UI"/>
               </a:rPr>
-              <a:t>1.8</a:t>
+              <a:t>0.8</a:t>
             </a:r>
           </a:p>
         </p:txBody>
@@ -11725,7 +11725,7 @@
                 </a:solidFill>
                 <a:latin typeface="Segoe UI"/>
               </a:rPr>
-              <a:t>2.73</a:t>
+              <a:t>3.63</a:t>
             </a:r>
           </a:p>
         </p:txBody>
@@ -11888,7 +11888,7 @@
                 </a:solidFill>
                 <a:latin typeface="Segoe UI"/>
               </a:rPr>
-              <a:t>2024-W51</a:t>
+              <a:t>2025-W40</a:t>
             </a:r>
           </a:p>
         </p:txBody>
@@ -11930,7 +11930,7 @@
                 </a:solidFill>
                 <a:latin typeface="Segoe UI"/>
               </a:rPr>
-              <a:t>7</a:t>
+              <a:t>6</a:t>
             </a:r>
           </a:p>
         </p:txBody>
@@ -11972,7 +11972,7 @@
                 </a:solidFill>
                 <a:latin typeface="Segoe UI"/>
               </a:rPr>
-              <a:t>2.5</a:t>
+              <a:t>1.0</a:t>
             </a:r>
           </a:p>
         </p:txBody>
@@ -12014,7 +12014,7 @@
                 </a:solidFill>
                 <a:latin typeface="Segoe UI"/>
               </a:rPr>
-              <a:t>2.58</a:t>
+              <a:t>4.05</a:t>
             </a:r>
           </a:p>
         </p:txBody>
@@ -12177,7 +12177,7 @@
                 </a:solidFill>
                 <a:latin typeface="Segoe UI"/>
               </a:rPr>
-              <a:t>2024-W52</a:t>
+              <a:t>2025-W41</a:t>
             </a:r>
           </a:p>
         </p:txBody>
@@ -12219,7 +12219,7 @@
                 </a:solidFill>
                 <a:latin typeface="Segoe UI"/>
               </a:rPr>
-              <a:t>7</a:t>
+              <a:t>5</a:t>
             </a:r>
           </a:p>
         </p:txBody>
@@ -12261,7 +12261,7 @@
                 </a:solidFill>
                 <a:latin typeface="Segoe UI"/>
               </a:rPr>
-              <a:t>2.3</a:t>
+              <a:t>1.1</a:t>
             </a:r>
           </a:p>
         </p:txBody>
@@ -12303,7 +12303,7 @@
                 </a:solidFill>
                 <a:latin typeface="Segoe UI"/>
               </a:rPr>
-              <a:t>2.82</a:t>
+              <a:t>3.02</a:t>
             </a:r>
           </a:p>
         </p:txBody>
@@ -12422,7 +12422,7 @@
                 </a:solidFill>
                 <a:latin typeface="Segoe UI"/>
               </a:rPr>
-              <a:t>2025-W01</a:t>
+              <a:t>2025-W42</a:t>
             </a:r>
           </a:p>
         </p:txBody>
@@ -12506,7 +12506,7 @@
                 </a:solidFill>
                 <a:latin typeface="Segoe UI"/>
               </a:rPr>
-              <a:t>3.3</a:t>
+              <a:t>1.6</a:t>
             </a:r>
           </a:p>
         </p:txBody>
@@ -12548,7 +12548,7 @@
                 </a:solidFill>
                 <a:latin typeface="Segoe UI"/>
               </a:rPr>
-              <a:t>-0.16</a:t>
+              <a:t>0.94</a:t>
             </a:r>
           </a:p>
         </p:txBody>
@@ -12667,7 +12667,7 @@
                 </a:solidFill>
                 <a:latin typeface="Segoe UI"/>
               </a:rPr>
-              <a:t>2025-W02</a:t>
+              <a:t>2025-W43</a:t>
             </a:r>
           </a:p>
         </p:txBody>
@@ -12709,7 +12709,7 @@
                 </a:solidFill>
                 <a:latin typeface="Segoe UI"/>
               </a:rPr>
-              <a:t>5</a:t>
+              <a:t>3</a:t>
             </a:r>
           </a:p>
         </p:txBody>
@@ -12751,7 +12751,7 @@
                 </a:solidFill>
                 <a:latin typeface="Segoe UI"/>
               </a:rPr>
-              <a:t>3.6</a:t>
+              <a:t>1.5</a:t>
             </a:r>
           </a:p>
         </p:txBody>
@@ -12793,7 +12793,7 @@
                 </a:solidFill>
                 <a:latin typeface="Segoe UI"/>
               </a:rPr>
-              <a:t>0.69</a:t>
+              <a:t>1.04</a:t>
             </a:r>
           </a:p>
         </p:txBody>
@@ -12835,7 +12835,7 @@
                 </a:solidFill>
                 <a:latin typeface="Segoe UI"/>
               </a:rPr>
-              <a:t>stable</a:t>
+              <a:t>below threshold</a:t>
             </a:r>
           </a:p>
         </p:txBody>
@@ -12912,7 +12912,7 @@
                 </a:solidFill>
                 <a:latin typeface="Segoe UI"/>
               </a:rPr>
-              <a:t>Quiet, quiet, then 7 contacts against 1.5 expected, and it fires.</a:t>
+              <a:t>Quiet, quiet, then 5 contacts against 0.8 expected, and it fires.</a:t>
             </a:r>
           </a:p>
           <a:p>
